--- a/lecture_slides/15_chapter_multiple_regression/_practice_exercises/15_chapter_practice_exercises.pptx
+++ b/lecture_slides/15_chapter_multiple_regression/_practice_exercises/15_chapter_practice_exercises.pptx
@@ -112,6 +112,11 @@
       </a:defRPr>
     </a:lvl9pPr>
   </p:defaultTextStyle>
+  <p:extLst>
+    <p:ext uri="{EFAFB233-063F-42B5-8137-9DF3F51BA10A}">
+      <p15:sldGuideLst xmlns:p15="http://schemas.microsoft.com/office/powerpoint/2012/main"/>
+    </p:ext>
+  </p:extLst>
 </p:presentation>
 </file>
 
@@ -262,7 +267,7 @@
           <a:p>
             <a:fld id="{5DC4B633-3ACF-5C4E-AFBB-35FC5622A892}" type="datetimeFigureOut">
               <a:rPr lang="en-US" smtClean="0"/>
-              <a:t>2/27/26</a:t>
+              <a:t>3/4/26</a:t>
             </a:fld>
             <a:endParaRPr lang="en-US"/>
           </a:p>
@@ -460,7 +465,7 @@
           <a:p>
             <a:fld id="{5DC4B633-3ACF-5C4E-AFBB-35FC5622A892}" type="datetimeFigureOut">
               <a:rPr lang="en-US" smtClean="0"/>
-              <a:t>2/27/26</a:t>
+              <a:t>3/4/26</a:t>
             </a:fld>
             <a:endParaRPr lang="en-US"/>
           </a:p>
@@ -668,7 +673,7 @@
           <a:p>
             <a:fld id="{5DC4B633-3ACF-5C4E-AFBB-35FC5622A892}" type="datetimeFigureOut">
               <a:rPr lang="en-US" smtClean="0"/>
-              <a:t>2/27/26</a:t>
+              <a:t>3/4/26</a:t>
             </a:fld>
             <a:endParaRPr lang="en-US"/>
           </a:p>
@@ -866,7 +871,7 @@
           <a:p>
             <a:fld id="{5DC4B633-3ACF-5C4E-AFBB-35FC5622A892}" type="datetimeFigureOut">
               <a:rPr lang="en-US" smtClean="0"/>
-              <a:t>2/27/26</a:t>
+              <a:t>3/4/26</a:t>
             </a:fld>
             <a:endParaRPr lang="en-US"/>
           </a:p>
@@ -1141,7 +1146,7 @@
           <a:p>
             <a:fld id="{5DC4B633-3ACF-5C4E-AFBB-35FC5622A892}" type="datetimeFigureOut">
               <a:rPr lang="en-US" smtClean="0"/>
-              <a:t>2/27/26</a:t>
+              <a:t>3/4/26</a:t>
             </a:fld>
             <a:endParaRPr lang="en-US"/>
           </a:p>
@@ -1406,7 +1411,7 @@
           <a:p>
             <a:fld id="{5DC4B633-3ACF-5C4E-AFBB-35FC5622A892}" type="datetimeFigureOut">
               <a:rPr lang="en-US" smtClean="0"/>
-              <a:t>2/27/26</a:t>
+              <a:t>3/4/26</a:t>
             </a:fld>
             <a:endParaRPr lang="en-US"/>
           </a:p>
@@ -1818,7 +1823,7 @@
           <a:p>
             <a:fld id="{5DC4B633-3ACF-5C4E-AFBB-35FC5622A892}" type="datetimeFigureOut">
               <a:rPr lang="en-US" smtClean="0"/>
-              <a:t>2/27/26</a:t>
+              <a:t>3/4/26</a:t>
             </a:fld>
             <a:endParaRPr lang="en-US"/>
           </a:p>
@@ -1959,7 +1964,7 @@
           <a:p>
             <a:fld id="{5DC4B633-3ACF-5C4E-AFBB-35FC5622A892}" type="datetimeFigureOut">
               <a:rPr lang="en-US" smtClean="0"/>
-              <a:t>2/27/26</a:t>
+              <a:t>3/4/26</a:t>
             </a:fld>
             <a:endParaRPr lang="en-US"/>
           </a:p>
@@ -2072,7 +2077,7 @@
           <a:p>
             <a:fld id="{5DC4B633-3ACF-5C4E-AFBB-35FC5622A892}" type="datetimeFigureOut">
               <a:rPr lang="en-US" smtClean="0"/>
-              <a:t>2/27/26</a:t>
+              <a:t>3/4/26</a:t>
             </a:fld>
             <a:endParaRPr lang="en-US"/>
           </a:p>
@@ -2383,7 +2388,7 @@
           <a:p>
             <a:fld id="{5DC4B633-3ACF-5C4E-AFBB-35FC5622A892}" type="datetimeFigureOut">
               <a:rPr lang="en-US" smtClean="0"/>
-              <a:t>2/27/26</a:t>
+              <a:t>3/4/26</a:t>
             </a:fld>
             <a:endParaRPr lang="en-US"/>
           </a:p>
@@ -2671,7 +2676,7 @@
           <a:p>
             <a:fld id="{5DC4B633-3ACF-5C4E-AFBB-35FC5622A892}" type="datetimeFigureOut">
               <a:rPr lang="en-US" smtClean="0"/>
-              <a:t>2/27/26</a:t>
+              <a:t>3/4/26</a:t>
             </a:fld>
             <a:endParaRPr lang="en-US"/>
           </a:p>
@@ -2912,7 +2917,7 @@
           <a:p>
             <a:fld id="{5DC4B633-3ACF-5C4E-AFBB-35FC5622A892}" type="datetimeFigureOut">
               <a:rPr lang="en-US" smtClean="0"/>
-              <a:t>2/27/26</a:t>
+              <a:t>3/4/26</a:t>
             </a:fld>
             <a:endParaRPr lang="en-US"/>
           </a:p>
@@ -3739,7 +3744,7 @@
         <p:spPr>
           <a:xfrm>
             <a:off x="5906428" y="1228195"/>
-            <a:ext cx="5735445" cy="4247317"/>
+            <a:ext cx="5826513" cy="4524315"/>
           </a:xfrm>
           <a:prstGeom prst="rect">
             <a:avLst/>
@@ -3802,9 +3807,13 @@
           </a:p>
           <a:p>
             <a:pPr lvl="0"/>
+            <a:endParaRPr lang="en-US" dirty="0"/>
+          </a:p>
+          <a:p>
+            <a:pPr lvl="0"/>
             <a:r>
               <a:rPr lang="en-US" dirty="0"/>
-              <a:t>Cannot be determined based on the given information.</a:t>
+              <a:t>E) Cannot be determined based on the given information.</a:t>
             </a:r>
           </a:p>
         </p:txBody>
@@ -4126,7 +4135,7 @@
         <p:spPr>
           <a:xfrm>
             <a:off x="5906428" y="1228195"/>
-            <a:ext cx="5735445" cy="4247317"/>
+            <a:ext cx="5735445" cy="4801314"/>
           </a:xfrm>
           <a:prstGeom prst="rect">
             <a:avLst/>
@@ -4172,12 +4181,23 @@
           <a:p>
             <a:pPr lvl="0"/>
             <a:r>
+              <a:rPr lang="en-US" dirty="0"/>
+              <a:t>C) Distance, because its correlation with transportation cost is the largest.</a:t>
+            </a:r>
+          </a:p>
+          <a:p>
+            <a:pPr lvl="0"/>
+            <a:endParaRPr lang="en-US" dirty="0"/>
+          </a:p>
+          <a:p>
+            <a:pPr lvl="0"/>
+            <a:r>
               <a:rPr lang="en-US" dirty="0">
                 <a:solidFill>
                   <a:srgbClr val="FF0000"/>
                 </a:solidFill>
               </a:rPr>
-              <a:t>C) Distance, because its correlation with transportation cost is the largest.</a:t>
+              <a:t>D) Distance, because it has the smallest p-value.</a:t>
             </a:r>
           </a:p>
           <a:p>
@@ -4188,14 +4208,7 @@
             <a:pPr lvl="0"/>
             <a:r>
               <a:rPr lang="en-US" dirty="0"/>
-              <a:t>D) Distance, because it has the smallest p-value.</a:t>
-            </a:r>
-          </a:p>
-          <a:p>
-            <a:pPr lvl="0"/>
-            <a:r>
-              <a:rPr lang="en-US" dirty="0"/>
-              <a:t>Cannot be determined based on the given information.</a:t>
+              <a:t>E) Cannot be determined based on the given information.</a:t>
             </a:r>
           </a:p>
         </p:txBody>
